--- a/media/module0/slides.pptx
+++ b/media/module0/slides.pptx
@@ -56,6 +56,12 @@
     <p:sldId id="304" r:id="rId56"/>
     <p:sldId id="305" r:id="rId57"/>
     <p:sldId id="306" r:id="rId58"/>
+    <p:sldId id="307" r:id="rId59"/>
+    <p:sldId id="308" r:id="rId60"/>
+    <p:sldId id="309" r:id="rId61"/>
+    <p:sldId id="310" r:id="rId62"/>
+    <p:sldId id="311" r:id="rId63"/>
+    <p:sldId id="312" r:id="rId64"/>
   </p:sldIdLst>
   <p:sldSz cx="12191695" cy="6858000" type="screen4x3"/>
   <p:notesSz cx="6858000" cy="9144000"/>
@@ -2933,6 +2939,426 @@
           <a:p>
             <a:r>
               <a:t>Run from course repository root.</a:t>
+            </a:r>
+          </a:p>
+        </p:txBody>
+      </p:sp>
+      <p:sp>
+        <p:nvSpPr>
+          <p:cNvPr id="4" name="Slide Number Placeholder 3"/>
+          <p:cNvSpPr>
+            <a:spLocks noGrp="1"/>
+          </p:cNvSpPr>
+          <p:nvPr>
+            <p:ph type="sldNum" idx="5" sz="quarter"/>
+          </p:nvPr>
+        </p:nvSpPr>
+        <p:spPr/>
+      </p:sp>
+    </p:spTree>
+  </p:cSld>
+  <p:clrMapOvr>
+    <a:masterClrMapping/>
+  </p:clrMapOvr>
+</p:notes>
+</file>
+
+<file path=ppt/notesSlides/notesSlide41.xml><?xml version="1.0" encoding="utf-8"?>
+<p:notes xmlns:a="http://schemas.openxmlformats.org/drawingml/2006/main" xmlns:p="http://schemas.openxmlformats.org/presentationml/2006/main" xmlns:r="http://schemas.openxmlformats.org/officeDocument/2006/relationships">
+  <p:cSld>
+    <p:spTree>
+      <p:nvGrpSpPr>
+        <p:cNvPr id="1" name=""/>
+        <p:cNvGrpSpPr/>
+        <p:nvPr/>
+      </p:nvGrpSpPr>
+      <p:grpSpPr>
+        <a:xfrm>
+          <a:off x="0" y="0"/>
+          <a:ext cx="0" cy="0"/>
+          <a:chOff x="0" y="0"/>
+          <a:chExt cx="0" cy="0"/>
+        </a:xfrm>
+      </p:grpSpPr>
+      <p:sp>
+        <p:nvSpPr>
+          <p:cNvPr id="2" name="Slide Image Placeholder 1"/>
+          <p:cNvSpPr>
+            <a:spLocks noGrp="1"/>
+          </p:cNvSpPr>
+          <p:nvPr>
+            <p:ph type="sldImg" idx="2"/>
+          </p:nvPr>
+        </p:nvSpPr>
+        <p:spPr/>
+      </p:sp>
+      <p:sp>
+        <p:nvSpPr>
+          <p:cNvPr id="3" name="Notes Placeholder 2"/>
+          <p:cNvSpPr>
+            <a:spLocks noGrp="1"/>
+          </p:cNvSpPr>
+          <p:nvPr>
+            <p:ph type="body" idx="3" sz="quarter"/>
+          </p:nvPr>
+        </p:nvSpPr>
+        <p:spPr/>
+        <p:txBody>
+          <a:bodyPr/>
+          <a:lstStyle/>
+          <a:p>
+            <a:r>
+              <a:t>Hands-on: module0/examples/install/</a:t>
+            </a:r>
+          </a:p>
+        </p:txBody>
+      </p:sp>
+      <p:sp>
+        <p:nvSpPr>
+          <p:cNvPr id="4" name="Slide Number Placeholder 3"/>
+          <p:cNvSpPr>
+            <a:spLocks noGrp="1"/>
+          </p:cNvSpPr>
+          <p:nvPr>
+            <p:ph type="sldNum" idx="5" sz="quarter"/>
+          </p:nvPr>
+        </p:nvSpPr>
+        <p:spPr/>
+      </p:sp>
+    </p:spTree>
+  </p:cSld>
+  <p:clrMapOvr>
+    <a:masterClrMapping/>
+  </p:clrMapOvr>
+</p:notes>
+</file>
+
+<file path=ppt/notesSlides/notesSlide42.xml><?xml version="1.0" encoding="utf-8"?>
+<p:notes xmlns:a="http://schemas.openxmlformats.org/drawingml/2006/main" xmlns:p="http://schemas.openxmlformats.org/presentationml/2006/main" xmlns:r="http://schemas.openxmlformats.org/officeDocument/2006/relationships">
+  <p:cSld>
+    <p:spTree>
+      <p:nvGrpSpPr>
+        <p:cNvPr id="1" name=""/>
+        <p:cNvGrpSpPr/>
+        <p:nvPr/>
+      </p:nvGrpSpPr>
+      <p:grpSpPr>
+        <a:xfrm>
+          <a:off x="0" y="0"/>
+          <a:ext cx="0" cy="0"/>
+          <a:chOff x="0" y="0"/>
+          <a:chExt cx="0" cy="0"/>
+        </a:xfrm>
+      </p:grpSpPr>
+      <p:sp>
+        <p:nvSpPr>
+          <p:cNvPr id="2" name="Slide Image Placeholder 1"/>
+          <p:cNvSpPr>
+            <a:spLocks noGrp="1"/>
+          </p:cNvSpPr>
+          <p:nvPr>
+            <p:ph type="sldImg" idx="2"/>
+          </p:nvPr>
+        </p:nvSpPr>
+        <p:spPr/>
+      </p:sp>
+      <p:sp>
+        <p:nvSpPr>
+          <p:cNvPr id="3" name="Notes Placeholder 2"/>
+          <p:cNvSpPr>
+            <a:spLocks noGrp="1"/>
+          </p:cNvSpPr>
+          <p:nvPr>
+            <p:ph type="body" idx="3" sz="quarter"/>
+          </p:nvPr>
+        </p:nvSpPr>
+        <p:spPr/>
+        <p:txBody>
+          <a:bodyPr/>
+          <a:lstStyle/>
+          <a:p>
+            <a:r>
+              <a:t>Hands-on: module0/examples/project/</a:t>
+            </a:r>
+          </a:p>
+        </p:txBody>
+      </p:sp>
+      <p:sp>
+        <p:nvSpPr>
+          <p:cNvPr id="4" name="Slide Number Placeholder 3"/>
+          <p:cNvSpPr>
+            <a:spLocks noGrp="1"/>
+          </p:cNvSpPr>
+          <p:nvPr>
+            <p:ph type="sldNum" idx="5" sz="quarter"/>
+          </p:nvPr>
+        </p:nvSpPr>
+        <p:spPr/>
+      </p:sp>
+    </p:spTree>
+  </p:cSld>
+  <p:clrMapOvr>
+    <a:masterClrMapping/>
+  </p:clrMapOvr>
+</p:notes>
+</file>
+
+<file path=ppt/notesSlides/notesSlide43.xml><?xml version="1.0" encoding="utf-8"?>
+<p:notes xmlns:a="http://schemas.openxmlformats.org/drawingml/2006/main" xmlns:p="http://schemas.openxmlformats.org/presentationml/2006/main" xmlns:r="http://schemas.openxmlformats.org/officeDocument/2006/relationships">
+  <p:cSld>
+    <p:spTree>
+      <p:nvGrpSpPr>
+        <p:cNvPr id="1" name=""/>
+        <p:cNvGrpSpPr/>
+        <p:nvPr/>
+      </p:nvGrpSpPr>
+      <p:grpSpPr>
+        <a:xfrm>
+          <a:off x="0" y="0"/>
+          <a:ext cx="0" cy="0"/>
+          <a:chOff x="0" y="0"/>
+          <a:chExt cx="0" cy="0"/>
+        </a:xfrm>
+      </p:grpSpPr>
+      <p:sp>
+        <p:nvSpPr>
+          <p:cNvPr id="2" name="Slide Image Placeholder 1"/>
+          <p:cNvSpPr>
+            <a:spLocks noGrp="1"/>
+          </p:cNvSpPr>
+          <p:nvPr>
+            <p:ph type="sldImg" idx="2"/>
+          </p:nvPr>
+        </p:nvSpPr>
+        <p:spPr/>
+      </p:sp>
+      <p:sp>
+        <p:nvSpPr>
+          <p:cNvPr id="3" name="Notes Placeholder 2"/>
+          <p:cNvSpPr>
+            <a:spLocks noGrp="1"/>
+          </p:cNvSpPr>
+          <p:nvPr>
+            <p:ph type="body" idx="3" sz="quarter"/>
+          </p:nvPr>
+        </p:nvSpPr>
+        <p:spPr/>
+        <p:txBody>
+          <a:bodyPr/>
+          <a:lstStyle/>
+          <a:p>
+            <a:r>
+              <a:t>Hands-on: module0/examples/install-full/</a:t>
+            </a:r>
+          </a:p>
+        </p:txBody>
+      </p:sp>
+      <p:sp>
+        <p:nvSpPr>
+          <p:cNvPr id="4" name="Slide Number Placeholder 3"/>
+          <p:cNvSpPr>
+            <a:spLocks noGrp="1"/>
+          </p:cNvSpPr>
+          <p:nvPr>
+            <p:ph type="sldNum" idx="5" sz="quarter"/>
+          </p:nvPr>
+        </p:nvSpPr>
+        <p:spPr/>
+      </p:sp>
+    </p:spTree>
+  </p:cSld>
+  <p:clrMapOvr>
+    <a:masterClrMapping/>
+  </p:clrMapOvr>
+</p:notes>
+</file>
+
+<file path=ppt/notesSlides/notesSlide44.xml><?xml version="1.0" encoding="utf-8"?>
+<p:notes xmlns:a="http://schemas.openxmlformats.org/drawingml/2006/main" xmlns:p="http://schemas.openxmlformats.org/presentationml/2006/main" xmlns:r="http://schemas.openxmlformats.org/officeDocument/2006/relationships">
+  <p:cSld>
+    <p:spTree>
+      <p:nvGrpSpPr>
+        <p:cNvPr id="1" name=""/>
+        <p:cNvGrpSpPr/>
+        <p:nvPr/>
+      </p:nvGrpSpPr>
+      <p:grpSpPr>
+        <a:xfrm>
+          <a:off x="0" y="0"/>
+          <a:ext cx="0" cy="0"/>
+          <a:chOff x="0" y="0"/>
+          <a:chExt cx="0" cy="0"/>
+        </a:xfrm>
+      </p:grpSpPr>
+      <p:sp>
+        <p:nvSpPr>
+          <p:cNvPr id="2" name="Slide Image Placeholder 1"/>
+          <p:cNvSpPr>
+            <a:spLocks noGrp="1"/>
+          </p:cNvSpPr>
+          <p:nvPr>
+            <p:ph type="sldImg" idx="2"/>
+          </p:nvPr>
+        </p:nvSpPr>
+        <p:spPr/>
+      </p:sp>
+      <p:sp>
+        <p:nvSpPr>
+          <p:cNvPr id="3" name="Notes Placeholder 2"/>
+          <p:cNvSpPr>
+            <a:spLocks noGrp="1"/>
+          </p:cNvSpPr>
+          <p:nvPr>
+            <p:ph type="body" idx="3" sz="quarter"/>
+          </p:nvPr>
+        </p:nvSpPr>
+        <p:spPr/>
+        <p:txBody>
+          <a:bodyPr/>
+          <a:lstStyle/>
+          <a:p>
+            <a:r>
+              <a:t>Hands-on: module0/examples/hello/</a:t>
+            </a:r>
+          </a:p>
+        </p:txBody>
+      </p:sp>
+      <p:sp>
+        <p:nvSpPr>
+          <p:cNvPr id="4" name="Slide Number Placeholder 3"/>
+          <p:cNvSpPr>
+            <a:spLocks noGrp="1"/>
+          </p:cNvSpPr>
+          <p:nvPr>
+            <p:ph type="sldNum" idx="5" sz="quarter"/>
+          </p:nvPr>
+        </p:nvSpPr>
+        <p:spPr/>
+      </p:sp>
+    </p:spTree>
+  </p:cSld>
+  <p:clrMapOvr>
+    <a:masterClrMapping/>
+  </p:clrMapOvr>
+</p:notes>
+</file>
+
+<file path=ppt/notesSlides/notesSlide45.xml><?xml version="1.0" encoding="utf-8"?>
+<p:notes xmlns:a="http://schemas.openxmlformats.org/drawingml/2006/main" xmlns:p="http://schemas.openxmlformats.org/presentationml/2006/main" xmlns:r="http://schemas.openxmlformats.org/officeDocument/2006/relationships">
+  <p:cSld>
+    <p:spTree>
+      <p:nvGrpSpPr>
+        <p:cNvPr id="1" name=""/>
+        <p:cNvGrpSpPr/>
+        <p:nvPr/>
+      </p:nvGrpSpPr>
+      <p:grpSpPr>
+        <a:xfrm>
+          <a:off x="0" y="0"/>
+          <a:ext cx="0" cy="0"/>
+          <a:chOff x="0" y="0"/>
+          <a:chExt cx="0" cy="0"/>
+        </a:xfrm>
+      </p:grpSpPr>
+      <p:sp>
+        <p:nvSpPr>
+          <p:cNvPr id="2" name="Slide Image Placeholder 1"/>
+          <p:cNvSpPr>
+            <a:spLocks noGrp="1"/>
+          </p:cNvSpPr>
+          <p:nvPr>
+            <p:ph type="sldImg" idx="2"/>
+          </p:nvPr>
+        </p:nvSpPr>
+        <p:spPr/>
+      </p:sp>
+      <p:sp>
+        <p:nvSpPr>
+          <p:cNvPr id="3" name="Notes Placeholder 2"/>
+          <p:cNvSpPr>
+            <a:spLocks noGrp="1"/>
+          </p:cNvSpPr>
+          <p:nvPr>
+            <p:ph type="body" idx="3" sz="quarter"/>
+          </p:nvPr>
+        </p:nvSpPr>
+        <p:spPr/>
+        <p:txBody>
+          <a:bodyPr/>
+          <a:lstStyle/>
+          <a:p>
+            <a:r>
+              <a:t>From MODULE0 Learning Outcomes.</a:t>
+            </a:r>
+          </a:p>
+        </p:txBody>
+      </p:sp>
+      <p:sp>
+        <p:nvSpPr>
+          <p:cNvPr id="4" name="Slide Number Placeholder 3"/>
+          <p:cNvSpPr>
+            <a:spLocks noGrp="1"/>
+          </p:cNvSpPr>
+          <p:nvPr>
+            <p:ph type="sldNum" idx="5" sz="quarter"/>
+          </p:nvPr>
+        </p:nvSpPr>
+        <p:spPr/>
+      </p:sp>
+    </p:spTree>
+  </p:cSld>
+  <p:clrMapOvr>
+    <a:masterClrMapping/>
+  </p:clrMapOvr>
+</p:notes>
+</file>
+
+<file path=ppt/notesSlides/notesSlide46.xml><?xml version="1.0" encoding="utf-8"?>
+<p:notes xmlns:a="http://schemas.openxmlformats.org/drawingml/2006/main" xmlns:p="http://schemas.openxmlformats.org/presentationml/2006/main" xmlns:r="http://schemas.openxmlformats.org/officeDocument/2006/relationships">
+  <p:cSld>
+    <p:spTree>
+      <p:nvGrpSpPr>
+        <p:cNvPr id="1" name=""/>
+        <p:cNvGrpSpPr/>
+        <p:nvPr/>
+      </p:nvGrpSpPr>
+      <p:grpSpPr>
+        <a:xfrm>
+          <a:off x="0" y="0"/>
+          <a:ext cx="0" cy="0"/>
+          <a:chOff x="0" y="0"/>
+          <a:chExt cx="0" cy="0"/>
+        </a:xfrm>
+      </p:grpSpPr>
+      <p:sp>
+        <p:nvSpPr>
+          <p:cNvPr id="2" name="Slide Image Placeholder 1"/>
+          <p:cNvSpPr>
+            <a:spLocks noGrp="1"/>
+          </p:cNvSpPr>
+          <p:nvPr>
+            <p:ph type="sldImg" idx="2"/>
+          </p:nvPr>
+        </p:nvSpPr>
+        <p:spPr/>
+      </p:sp>
+      <p:sp>
+        <p:nvSpPr>
+          <p:cNvPr id="3" name="Notes Placeholder 2"/>
+          <p:cNvSpPr>
+            <a:spLocks noGrp="1"/>
+          </p:cNvSpPr>
+          <p:nvPr>
+            <p:ph type="body" idx="3" sz="quarter"/>
+          </p:nvPr>
+        </p:nvSpPr>
+        <p:spPr/>
+        <p:txBody>
+          <a:bodyPr/>
+          <a:lstStyle/>
+          <a:p>
+            <a:r>
+              <a:t>From MODULE0 Learning Outcomes.</a:t>
             </a:r>
           </a:p>
         </p:txBody>
@@ -15251,7 +15677,7 @@
               </a:defRPr>
             </a:pPr>
             <a:r>
-              <a:t>$ ./scripts/module0.sh --check</a:t>
+              <a:t>$ verilator --version</a:t>
             </a:r>
           </a:p>
         </p:txBody>
@@ -15345,8 +15771,8 @@
         </p:nvSpPr>
         <p:spPr>
           <a:xfrm>
-            <a:off x="548640" y="2743200"/>
-            <a:ext cx="11064240" cy="1371600"/>
+            <a:off x="548640" y="411480"/>
+            <a:ext cx="11064240" cy="777240"/>
           </a:xfrm>
           <a:prstGeom prst="rect">
             <a:avLst/>
@@ -15359,11 +15785,11 @@
           </a:bodyPr>
           <a:lstStyle/>
           <a:p>
-            <a:pPr algn="ctr">
-              <a:lnSpc>
-                <a:spcPts val="2200"/>
-              </a:lnSpc>
-              <a:defRPr sz="3600" b="1">
+            <a:pPr>
+              <a:lnSpc>
+                <a:spcPts val="2200"/>
+              </a:lnSpc>
+              <a:defRPr sz="2800" b="1">
                 <a:solidFill>
                   <a:srgbClr val="1A1A2E"/>
                 </a:solidFill>
@@ -15371,7 +15797,7 @@
               </a:defRPr>
             </a:pPr>
             <a:r>
-              <a:t>Practice &amp; assessment</a:t>
+              <a:t>Demo: Verify toolchain</a:t>
             </a:r>
           </a:p>
         </p:txBody>
@@ -15379,6 +15805,131 @@
       <p:sp>
         <p:nvSpPr>
           <p:cNvPr id="3" name="TextBox 2"/>
+          <p:cNvSpPr txBox="1"/>
+          <p:nvPr/>
+        </p:nvSpPr>
+        <p:spPr>
+          <a:xfrm>
+            <a:off x="548640" y="1051560"/>
+            <a:ext cx="11064240" cy="914400"/>
+          </a:xfrm>
+          <a:prstGeom prst="rect">
+            <a:avLst/>
+          </a:prstGeom>
+          <a:solidFill>
+            <a:srgbClr val="F4F4F4"/>
+          </a:solidFill>
+        </p:spPr>
+        <p:txBody>
+          <a:bodyPr wrap="square">
+            <a:noAutofit/>
+          </a:bodyPr>
+          <a:lstStyle/>
+          <a:p>
+            <a:pPr>
+              <a:lnSpc>
+                <a:spcPts val="2200"/>
+              </a:lnSpc>
+              <a:spcAft>
+                <a:spcPts val="200"/>
+              </a:spcAft>
+              <a:defRPr sz="2000" b="0">
+                <a:solidFill>
+                  <a:srgbClr val="333333"/>
+                </a:solidFill>
+                <a:latin typeface="Consolas"/>
+              </a:defRPr>
+            </a:pPr>
+            <a:r>
+              <a:t>$ verilator --version &amp;&amp; source scripts/setup_uvm_env.sh 2&gt;/dev/null</a:t>
+            </a:r>
+          </a:p>
+          <a:p>
+            <a:pPr>
+              <a:lnSpc>
+                <a:spcPts val="2200"/>
+              </a:lnSpc>
+              <a:spcAft>
+                <a:spcPts val="200"/>
+              </a:spcAft>
+              <a:defRPr sz="2000" b="0">
+                <a:solidFill>
+                  <a:srgbClr val="333333"/>
+                </a:solidFill>
+                <a:latin typeface="Consolas"/>
+              </a:defRPr>
+            </a:pPr>
+            <a:r>
+              <a:t>      || true &amp;&amp; test -f</a:t>
+            </a:r>
+          </a:p>
+          <a:p>
+            <a:pPr>
+              <a:lnSpc>
+                <a:spcPts val="2200"/>
+              </a:lnSpc>
+              <a:spcAft>
+                <a:spcPts val="200"/>
+              </a:spcAft>
+              <a:defRPr sz="2000" b="0">
+                <a:solidFill>
+                  <a:srgbClr val="333333"/>
+                </a:solidFill>
+                <a:latin typeface="Consolas"/>
+              </a:defRPr>
+            </a:pPr>
+            <a:r>
+              <a:t>      "${UVM_HOME:-tools/uvm-2017/1800.2-2017-1.0/src}/uvm_pkg.sv" &amp;&amp; echo</a:t>
+            </a:r>
+          </a:p>
+          <a:p>
+            <a:pPr>
+              <a:lnSpc>
+                <a:spcPts val="2200"/>
+              </a:lnSpc>
+              <a:spcAft>
+                <a:spcPts val="200"/>
+              </a:spcAft>
+              <a:defRPr sz="2000" b="0">
+                <a:solidFill>
+                  <a:srgbClr val="333333"/>
+                </a:solidFill>
+                <a:latin typeface="Consolas"/>
+              </a:defRPr>
+            </a:pPr>
+            <a:r>
+              <a:t>      "UVM library OK" &amp;&amp; make…</a:t>
+            </a:r>
+          </a:p>
+        </p:txBody>
+      </p:sp>
+      <p:pic>
+        <p:nvPicPr>
+          <p:cNvPr id="4" name="Picture 3" descr="ex01_install.png"/>
+          <p:cNvPicPr>
+            <a:picLocks noChangeAspect="1"/>
+          </p:cNvPicPr>
+          <p:nvPr/>
+        </p:nvPicPr>
+        <p:blipFill>
+          <a:blip r:embed="rId2"/>
+          <a:stretch>
+            <a:fillRect/>
+          </a:stretch>
+        </p:blipFill>
+        <p:spPr>
+          <a:xfrm>
+            <a:off x="548640" y="1965960"/>
+            <a:ext cx="7071358" cy="3977639"/>
+          </a:xfrm>
+          <a:prstGeom prst="rect">
+            <a:avLst/>
+          </a:prstGeom>
+        </p:spPr>
+      </p:pic>
+      <p:sp>
+        <p:nvSpPr>
+          <p:cNvPr id="5" name="TextBox 4"/>
           <p:cNvSpPr txBox="1"/>
           <p:nvPr/>
         </p:nvSpPr>
@@ -15467,7 +16018,7 @@
               </a:defRPr>
             </a:pPr>
             <a:r>
-              <a:t>Exercises</a:t>
+              <a:t>Demo: Project layout</a:t>
             </a:r>
           </a:p>
         </p:txBody>
@@ -15480,8 +16031,52 @@
         </p:nvSpPr>
         <p:spPr>
           <a:xfrm>
-            <a:off x="548640" y="1234440"/>
-            <a:ext cx="11064240" cy="4937760"/>
+            <a:off x="548640" y="1051560"/>
+            <a:ext cx="11064240" cy="914400"/>
+          </a:xfrm>
+          <a:prstGeom prst="rect">
+            <a:avLst/>
+          </a:prstGeom>
+          <a:solidFill>
+            <a:srgbClr val="F4F4F4"/>
+          </a:solidFill>
+        </p:spPr>
+        <p:txBody>
+          <a:bodyPr wrap="square">
+            <a:noAutofit/>
+          </a:bodyPr>
+          <a:lstStyle/>
+          <a:p>
+            <a:pPr>
+              <a:lnSpc>
+                <a:spcPts val="2200"/>
+              </a:lnSpc>
+              <a:spcAft>
+                <a:spcPts val="200"/>
+              </a:spcAft>
+              <a:defRPr sz="2000" b="0">
+                <a:solidFill>
+                  <a:srgbClr val="333333"/>
+                </a:solidFill>
+                <a:latin typeface="Consolas"/>
+              </a:defRPr>
+            </a:pPr>
+            <a:r>
+              <a:t>$ ls -la docs/MODULE0.md module1/README.md scripts/installation.sh</a:t>
+            </a:r>
+          </a:p>
+        </p:txBody>
+      </p:sp>
+      <p:sp>
+        <p:nvSpPr>
+          <p:cNvPr id="4" name="TextBox 3"/>
+          <p:cNvSpPr txBox="1"/>
+          <p:nvPr/>
+        </p:nvSpPr>
+        <p:spPr>
+          <a:xfrm>
+            <a:off x="548640" y="1965960"/>
+            <a:ext cx="11064240" cy="914400"/>
           </a:xfrm>
           <a:prstGeom prst="rect">
             <a:avLst/>
@@ -15498,101 +16093,22 @@
               <a:lnSpc>
                 <a:spcPts val="2200"/>
               </a:lnSpc>
-              <a:spcAft>
-                <a:spcPts val="1000"/>
-              </a:spcAft>
-              <a:defRPr sz="2000" b="0">
-                <a:solidFill>
-                  <a:srgbClr val="333333"/>
-                </a:solidFill>
-                <a:latin typeface="Calibri"/>
-              </a:defRPr>
-            </a:pPr>
-            <a:r>
-              <a:t>• Installation Verification</a:t>
-            </a:r>
-          </a:p>
-          <a:p>
-            <a:pPr>
-              <a:lnSpc>
-                <a:spcPts val="2200"/>
-              </a:lnSpc>
-              <a:spcAft>
-                <a:spcPts val="1000"/>
-              </a:spcAft>
-              <a:defRPr sz="2000" b="0">
-                <a:solidFill>
-                  <a:srgbClr val="333333"/>
-                </a:solidFill>
-                <a:latin typeface="Calibri"/>
-              </a:defRPr>
-            </a:pPr>
-            <a:r>
-              <a:t>• Environment Setup</a:t>
-            </a:r>
-          </a:p>
-          <a:p>
-            <a:pPr>
-              <a:lnSpc>
-                <a:spcPts val="2200"/>
-              </a:lnSpc>
-              <a:spcAft>
-                <a:spcPts val="1000"/>
-              </a:spcAft>
-              <a:defRPr sz="2000" b="0">
-                <a:solidFill>
-                  <a:srgbClr val="333333"/>
-                </a:solidFill>
-                <a:latin typeface="Calibri"/>
-              </a:defRPr>
-            </a:pPr>
-            <a:r>
-              <a:t>• First Test</a:t>
-            </a:r>
-          </a:p>
-          <a:p>
-            <a:pPr>
-              <a:lnSpc>
-                <a:spcPts val="2200"/>
-              </a:lnSpc>
-              <a:spcAft>
-                <a:spcPts val="1000"/>
-              </a:spcAft>
-              <a:defRPr sz="2000" b="0">
-                <a:solidFill>
-                  <a:srgbClr val="333333"/>
-                </a:solidFill>
-                <a:latin typeface="Calibri"/>
-              </a:defRPr>
-            </a:pPr>
-            <a:r>
-              <a:t>• IDE Configuration</a:t>
-            </a:r>
-          </a:p>
-          <a:p>
-            <a:pPr>
-              <a:lnSpc>
-                <a:spcPts val="2200"/>
-              </a:lnSpc>
-              <a:spcAft>
-                <a:spcPts val="1000"/>
-              </a:spcAft>
-              <a:defRPr sz="2000" b="0">
-                <a:solidFill>
-                  <a:srgbClr val="333333"/>
-                </a:solidFill>
-                <a:latin typeface="Calibri"/>
-              </a:defRPr>
-            </a:pPr>
-            <a:r>
-              <a:t>• Project Structure</a:t>
-            </a:r>
-          </a:p>
-        </p:txBody>
-      </p:sp>
-      <p:sp>
-        <p:nvSpPr>
-          <p:cNvPr id="4" name="TextBox 3"/>
+              <a:defRPr sz="2000" b="0">
+                <a:solidFill>
+                  <a:srgbClr val="333333"/>
+                </a:solidFill>
+                <a:latin typeface="Calibri"/>
+              </a:defRPr>
+            </a:pPr>
+            <a:r>
+              <a:t>(screenshot pending: assets/screenshots/ex02_project.png)</a:t>
+            </a:r>
+          </a:p>
+        </p:txBody>
+      </p:sp>
+      <p:sp>
+        <p:nvSpPr>
+          <p:cNvPr id="5" name="TextBox 4"/>
           <p:cNvSpPr txBox="1"/>
           <p:nvPr/>
         </p:nvSpPr>
@@ -15857,7 +16373,7 @@
               </a:defRPr>
             </a:pPr>
             <a:r>
-              <a:t>Assessment checklist</a:t>
+              <a:t>Demo: Optional full install</a:t>
             </a:r>
           </a:p>
         </p:txBody>
@@ -15870,13 +16386,15 @@
         </p:nvSpPr>
         <p:spPr>
           <a:xfrm>
-            <a:off x="548640" y="1234440"/>
-            <a:ext cx="11064240" cy="4937760"/>
+            <a:off x="548640" y="1051560"/>
+            <a:ext cx="11064240" cy="914400"/>
           </a:xfrm>
           <a:prstGeom prst="rect">
             <a:avLst/>
           </a:prstGeom>
-          <a:noFill/>
+          <a:solidFill>
+            <a:srgbClr val="F4F4F4"/>
+          </a:solidFill>
         </p:spPr>
         <p:txBody>
           <a:bodyPr wrap="square">
@@ -15889,119 +16407,48 @@
                 <a:spcPts val="2200"/>
               </a:lnSpc>
               <a:spcAft>
-                <a:spcPts val="1000"/>
-              </a:spcAft>
-              <a:defRPr sz="2000" b="0">
-                <a:solidFill>
-                  <a:srgbClr val="333333"/>
-                </a:solidFill>
-                <a:latin typeface="Calibri"/>
-              </a:defRPr>
-            </a:pPr>
-            <a:r>
-              <a:t>• Can install all required tools independently</a:t>
-            </a:r>
-          </a:p>
-          <a:p>
-            <a:pPr>
-              <a:lnSpc>
-                <a:spcPts val="2200"/>
-              </a:lnSpc>
-              <a:spcAft>
-                <a:spcPts val="1000"/>
-              </a:spcAft>
-              <a:defRPr sz="2000" b="0">
-                <a:solidFill>
-                  <a:srgbClr val="333333"/>
-                </a:solidFill>
-                <a:latin typeface="Calibri"/>
-              </a:defRPr>
-            </a:pPr>
-            <a:r>
-              <a:t>• Can set up Verilator</a:t>
-            </a:r>
-          </a:p>
-          <a:p>
-            <a:pPr>
-              <a:lnSpc>
-                <a:spcPts val="2200"/>
-              </a:lnSpc>
-              <a:spcAft>
-                <a:spcPts val="1000"/>
-              </a:spcAft>
-              <a:defRPr sz="2000" b="0">
-                <a:solidFill>
-                  <a:srgbClr val="333333"/>
-                </a:solidFill>
-                <a:latin typeface="Calibri"/>
-              </a:defRPr>
-            </a:pPr>
-            <a:r>
-              <a:t>• Can verify Verilator installation</a:t>
-            </a:r>
-          </a:p>
-          <a:p>
-            <a:pPr>
-              <a:lnSpc>
-                <a:spcPts val="2200"/>
-              </a:lnSpc>
-              <a:spcAft>
-                <a:spcPts val="1000"/>
-              </a:spcAft>
-              <a:defRPr sz="2000" b="0">
-                <a:solidFill>
-                  <a:srgbClr val="333333"/>
-                </a:solidFill>
-                <a:latin typeface="Calibri"/>
-              </a:defRPr>
-            </a:pPr>
-            <a:r>
-              <a:t>• Can verify UVM library installation</a:t>
-            </a:r>
-          </a:p>
-          <a:p>
-            <a:pPr>
-              <a:lnSpc>
-                <a:spcPts val="2200"/>
-              </a:lnSpc>
-              <a:spcAft>
-                <a:spcPts val="1000"/>
-              </a:spcAft>
-              <a:defRPr sz="2000" b="0">
-                <a:solidFill>
-                  <a:srgbClr val="333333"/>
-                </a:solidFill>
-                <a:latin typeface="Calibri"/>
-              </a:defRPr>
-            </a:pPr>
-            <a:r>
-              <a:t>• Can configure IDE for verification work</a:t>
-            </a:r>
-          </a:p>
-          <a:p>
-            <a:pPr>
-              <a:lnSpc>
-                <a:spcPts val="2200"/>
-              </a:lnSpc>
-              <a:spcAft>
-                <a:spcPts val="1000"/>
-              </a:spcAft>
-              <a:defRPr sz="2000" b="0">
-                <a:solidFill>
-                  <a:srgbClr val="333333"/>
-                </a:solidFill>
-                <a:latin typeface="Calibri"/>
-              </a:defRPr>
-            </a:pPr>
-            <a:r>
-              <a:t>• Can create and run a simple test</a:t>
-            </a:r>
-          </a:p>
-        </p:txBody>
-      </p:sp>
-      <p:sp>
-        <p:nvSpPr>
-          <p:cNvPr id="4" name="TextBox 3"/>
+                <a:spcPts val="200"/>
+              </a:spcAft>
+              <a:defRPr sz="2000" b="0">
+                <a:solidFill>
+                  <a:srgbClr val="333333"/>
+                </a:solidFill>
+                <a:latin typeface="Consolas"/>
+              </a:defRPr>
+            </a:pPr>
+            <a:r>
+              <a:t>$ ./scripts/installation.sh --help | head -20</a:t>
+            </a:r>
+          </a:p>
+        </p:txBody>
+      </p:sp>
+      <p:pic>
+        <p:nvPicPr>
+          <p:cNvPr id="4" name="Picture 3" descr="ex03_install-full.png"/>
+          <p:cNvPicPr>
+            <a:picLocks noChangeAspect="1"/>
+          </p:cNvPicPr>
+          <p:nvPr/>
+        </p:nvPicPr>
+        <p:blipFill>
+          <a:blip r:embed="rId2"/>
+          <a:stretch>
+            <a:fillRect/>
+          </a:stretch>
+        </p:blipFill>
+        <p:spPr>
+          <a:xfrm>
+            <a:off x="548640" y="1965960"/>
+            <a:ext cx="7071358" cy="3977639"/>
+          </a:xfrm>
+          <a:prstGeom prst="rect">
+            <a:avLst/>
+          </a:prstGeom>
+        </p:spPr>
+      </p:pic>
+      <p:sp>
+        <p:nvSpPr>
+          <p:cNvPr id="5" name="TextBox 4"/>
           <p:cNvSpPr txBox="1"/>
           <p:nvPr/>
         </p:nvSpPr>
@@ -16090,7 +16537,7 @@
               </a:defRPr>
             </a:pPr>
             <a:r>
-              <a:t>Summary &amp; next steps</a:t>
+              <a:t>Demo: First smoke test</a:t>
             </a:r>
           </a:p>
         </p:txBody>
@@ -16103,8 +16550,76 @@
         </p:nvSpPr>
         <p:spPr>
           <a:xfrm>
-            <a:off x="548640" y="1234440"/>
-            <a:ext cx="11064240" cy="4937760"/>
+            <a:off x="548640" y="1051560"/>
+            <a:ext cx="11064240" cy="914400"/>
+          </a:xfrm>
+          <a:prstGeom prst="rect">
+            <a:avLst/>
+          </a:prstGeom>
+          <a:solidFill>
+            <a:srgbClr val="F4F4F4"/>
+          </a:solidFill>
+        </p:spPr>
+        <p:txBody>
+          <a:bodyPr wrap="square">
+            <a:noAutofit/>
+          </a:bodyPr>
+          <a:lstStyle/>
+          <a:p>
+            <a:pPr>
+              <a:lnSpc>
+                <a:spcPts val="2200"/>
+              </a:lnSpc>
+              <a:spcAft>
+                <a:spcPts val="200"/>
+              </a:spcAft>
+              <a:defRPr sz="2000" b="0">
+                <a:solidFill>
+                  <a:srgbClr val="333333"/>
+                </a:solidFill>
+                <a:latin typeface="Consolas"/>
+              </a:defRPr>
+            </a:pPr>
+            <a:r>
+              <a:t>$ ./scripts/module1.sh --help | head -15</a:t>
+            </a:r>
+          </a:p>
+        </p:txBody>
+      </p:sp>
+      <p:pic>
+        <p:nvPicPr>
+          <p:cNvPr id="4" name="Picture 3" descr="ex04_hello.png"/>
+          <p:cNvPicPr>
+            <a:picLocks noChangeAspect="1"/>
+          </p:cNvPicPr>
+          <p:nvPr/>
+        </p:nvPicPr>
+        <p:blipFill>
+          <a:blip r:embed="rId2"/>
+          <a:stretch>
+            <a:fillRect/>
+          </a:stretch>
+        </p:blipFill>
+        <p:spPr>
+          <a:xfrm>
+            <a:off x="548640" y="1965960"/>
+            <a:ext cx="7071358" cy="3977639"/>
+          </a:xfrm>
+          <a:prstGeom prst="rect">
+            <a:avLst/>
+          </a:prstGeom>
+        </p:spPr>
+      </p:pic>
+      <p:sp>
+        <p:nvSpPr>
+          <p:cNvPr id="5" name="TextBox 4"/>
+          <p:cNvSpPr txBox="1"/>
+          <p:nvPr/>
+        </p:nvSpPr>
+        <p:spPr>
+          <a:xfrm>
+            <a:off x="548640" y="6355080"/>
+            <a:ext cx="11064240" cy="320040"/>
           </a:xfrm>
           <a:prstGeom prst="rect">
             <a:avLst/>
@@ -16117,6 +16632,1035 @@
           </a:bodyPr>
           <a:lstStyle/>
           <a:p>
+            <a:pPr algn="r">
+              <a:lnSpc>
+                <a:spcPts val="2200"/>
+              </a:lnSpc>
+              <a:defRPr sz="1000" b="0">
+                <a:solidFill>
+                  <a:srgbClr val="666666"/>
+                </a:solidFill>
+                <a:latin typeface="Calibri"/>
+              </a:defRPr>
+            </a:pPr>
+            <a:r>
+              <a:t>learn_uvm2017_sv_verilator / Module 0</a:t>
+            </a:r>
+          </a:p>
+        </p:txBody>
+      </p:sp>
+    </p:spTree>
+  </p:cSld>
+  <p:clrMapOvr>
+    <a:masterClrMapping/>
+  </p:clrMapOvr>
+</p:sld>
+</file>
+
+<file path=ppt/slides/slide52.xml><?xml version="1.0" encoding="utf-8"?>
+<p:sld xmlns:a="http://schemas.openxmlformats.org/drawingml/2006/main" xmlns:p="http://schemas.openxmlformats.org/presentationml/2006/main" xmlns:r="http://schemas.openxmlformats.org/officeDocument/2006/relationships">
+  <p:cSld>
+    <p:spTree>
+      <p:nvGrpSpPr>
+        <p:cNvPr id="1" name=""/>
+        <p:cNvGrpSpPr/>
+        <p:nvPr/>
+      </p:nvGrpSpPr>
+      <p:grpSpPr/>
+      <p:sp>
+        <p:nvSpPr>
+          <p:cNvPr id="2" name="TextBox 1"/>
+          <p:cNvSpPr txBox="1"/>
+          <p:nvPr/>
+        </p:nvSpPr>
+        <p:spPr>
+          <a:xfrm>
+            <a:off x="548640" y="2743200"/>
+            <a:ext cx="11064240" cy="1371600"/>
+          </a:xfrm>
+          <a:prstGeom prst="rect">
+            <a:avLst/>
+          </a:prstGeom>
+          <a:noFill/>
+        </p:spPr>
+        <p:txBody>
+          <a:bodyPr wrap="square">
+            <a:noAutofit/>
+          </a:bodyPr>
+          <a:lstStyle/>
+          <a:p>
+            <a:pPr algn="ctr">
+              <a:lnSpc>
+                <a:spcPts val="2200"/>
+              </a:lnSpc>
+              <a:defRPr sz="3600" b="1">
+                <a:solidFill>
+                  <a:srgbClr val="1A1A2E"/>
+                </a:solidFill>
+                <a:latin typeface="Calibri"/>
+              </a:defRPr>
+            </a:pPr>
+            <a:r>
+              <a:t>Practice &amp; assessment</a:t>
+            </a:r>
+          </a:p>
+        </p:txBody>
+      </p:sp>
+      <p:sp>
+        <p:nvSpPr>
+          <p:cNvPr id="3" name="TextBox 2"/>
+          <p:cNvSpPr txBox="1"/>
+          <p:nvPr/>
+        </p:nvSpPr>
+        <p:spPr>
+          <a:xfrm>
+            <a:off x="548640" y="6355080"/>
+            <a:ext cx="11064240" cy="320040"/>
+          </a:xfrm>
+          <a:prstGeom prst="rect">
+            <a:avLst/>
+          </a:prstGeom>
+          <a:noFill/>
+        </p:spPr>
+        <p:txBody>
+          <a:bodyPr wrap="square">
+            <a:noAutofit/>
+          </a:bodyPr>
+          <a:lstStyle/>
+          <a:p>
+            <a:pPr algn="r">
+              <a:lnSpc>
+                <a:spcPts val="2200"/>
+              </a:lnSpc>
+              <a:defRPr sz="1000" b="0">
+                <a:solidFill>
+                  <a:srgbClr val="666666"/>
+                </a:solidFill>
+                <a:latin typeface="Calibri"/>
+              </a:defRPr>
+            </a:pPr>
+            <a:r>
+              <a:t>learn_uvm2017_sv_verilator / Module 0</a:t>
+            </a:r>
+          </a:p>
+        </p:txBody>
+      </p:sp>
+    </p:spTree>
+  </p:cSld>
+  <p:clrMapOvr>
+    <a:masterClrMapping/>
+  </p:clrMapOvr>
+</p:sld>
+</file>
+
+<file path=ppt/slides/slide53.xml><?xml version="1.0" encoding="utf-8"?>
+<p:sld xmlns:a="http://schemas.openxmlformats.org/drawingml/2006/main" xmlns:p="http://schemas.openxmlformats.org/presentationml/2006/main" xmlns:r="http://schemas.openxmlformats.org/officeDocument/2006/relationships">
+  <p:cSld>
+    <p:spTree>
+      <p:nvGrpSpPr>
+        <p:cNvPr id="1" name=""/>
+        <p:cNvGrpSpPr/>
+        <p:nvPr/>
+      </p:nvGrpSpPr>
+      <p:grpSpPr/>
+      <p:sp>
+        <p:nvSpPr>
+          <p:cNvPr id="2" name="TextBox 1"/>
+          <p:cNvSpPr txBox="1"/>
+          <p:nvPr/>
+        </p:nvSpPr>
+        <p:spPr>
+          <a:xfrm>
+            <a:off x="548640" y="411480"/>
+            <a:ext cx="11064240" cy="777240"/>
+          </a:xfrm>
+          <a:prstGeom prst="rect">
+            <a:avLst/>
+          </a:prstGeom>
+          <a:noFill/>
+        </p:spPr>
+        <p:txBody>
+          <a:bodyPr wrap="square">
+            <a:noAutofit/>
+          </a:bodyPr>
+          <a:lstStyle/>
+          <a:p>
+            <a:pPr>
+              <a:lnSpc>
+                <a:spcPts val="2200"/>
+              </a:lnSpc>
+              <a:defRPr sz="2800" b="1">
+                <a:solidFill>
+                  <a:srgbClr val="1A1A2E"/>
+                </a:solidFill>
+                <a:latin typeface="Calibri"/>
+              </a:defRPr>
+            </a:pPr>
+            <a:r>
+              <a:t>What you should know (1/2)</a:t>
+            </a:r>
+          </a:p>
+        </p:txBody>
+      </p:sp>
+      <p:sp>
+        <p:nvSpPr>
+          <p:cNvPr id="3" name="TextBox 2"/>
+          <p:cNvSpPr txBox="1"/>
+          <p:nvPr/>
+        </p:nvSpPr>
+        <p:spPr>
+          <a:xfrm>
+            <a:off x="548640" y="1234440"/>
+            <a:ext cx="11064240" cy="4937760"/>
+          </a:xfrm>
+          <a:prstGeom prst="rect">
+            <a:avLst/>
+          </a:prstGeom>
+          <a:noFill/>
+        </p:spPr>
+        <p:txBody>
+          <a:bodyPr wrap="square">
+            <a:noAutofit/>
+          </a:bodyPr>
+          <a:lstStyle/>
+          <a:p>
+            <a:pPr>
+              <a:lnSpc>
+                <a:spcPts val="2200"/>
+              </a:lnSpc>
+              <a:spcAft>
+                <a:spcPts val="1000"/>
+              </a:spcAft>
+              <a:defRPr sz="2000" b="0">
+                <a:solidFill>
+                  <a:srgbClr val="333333"/>
+                </a:solidFill>
+                <a:latin typeface="Calibri"/>
+              </a:defRPr>
+            </a:pPr>
+            <a:r>
+              <a:t>• Install and configure all required tools</a:t>
+            </a:r>
+          </a:p>
+          <a:p>
+            <a:pPr>
+              <a:lnSpc>
+                <a:spcPts val="2200"/>
+              </a:lnSpc>
+              <a:spcAft>
+                <a:spcPts val="1000"/>
+              </a:spcAft>
+              <a:defRPr sz="2000" b="0">
+                <a:solidFill>
+                  <a:srgbClr val="333333"/>
+                </a:solidFill>
+                <a:latin typeface="Calibri"/>
+              </a:defRPr>
+            </a:pPr>
+            <a:r>
+              <a:t>• Set up Verilator</a:t>
+            </a:r>
+          </a:p>
+          <a:p>
+            <a:pPr>
+              <a:lnSpc>
+                <a:spcPts val="2200"/>
+              </a:lnSpc>
+              <a:spcAft>
+                <a:spcPts val="1000"/>
+              </a:spcAft>
+              <a:defRPr sz="2000" b="0">
+                <a:solidFill>
+                  <a:srgbClr val="333333"/>
+                </a:solidFill>
+                <a:latin typeface="Calibri"/>
+              </a:defRPr>
+            </a:pPr>
+            <a:r>
+              <a:t>• Install and verify UVM library</a:t>
+            </a:r>
+          </a:p>
+          <a:p>
+            <a:pPr>
+              <a:lnSpc>
+                <a:spcPts val="2200"/>
+              </a:lnSpc>
+              <a:spcAft>
+                <a:spcPts val="1000"/>
+              </a:spcAft>
+              <a:defRPr sz="2000" b="0">
+                <a:solidFill>
+                  <a:srgbClr val="333333"/>
+                </a:solidFill>
+                <a:latin typeface="Calibri"/>
+              </a:defRPr>
+            </a:pPr>
+            <a:r>
+              <a:t>• Configure your IDE for verification work</a:t>
+            </a:r>
+          </a:p>
+          <a:p>
+            <a:pPr>
+              <a:lnSpc>
+                <a:spcPts val="2200"/>
+              </a:lnSpc>
+              <a:spcAft>
+                <a:spcPts val="1000"/>
+              </a:spcAft>
+              <a:defRPr sz="2000" b="0">
+                <a:solidFill>
+                  <a:srgbClr val="333333"/>
+                </a:solidFill>
+                <a:latin typeface="Calibri"/>
+              </a:defRPr>
+            </a:pPr>
+            <a:r>
+              <a:t>• Create a basic project structure</a:t>
+            </a:r>
+          </a:p>
+          <a:p>
+            <a:pPr>
+              <a:lnSpc>
+                <a:spcPts val="2200"/>
+              </a:lnSpc>
+              <a:spcAft>
+                <a:spcPts val="1000"/>
+              </a:spcAft>
+              <a:defRPr sz="2000" b="0">
+                <a:solidFill>
+                  <a:srgbClr val="333333"/>
+                </a:solidFill>
+                <a:latin typeface="Calibri"/>
+              </a:defRPr>
+            </a:pPr>
+            <a:r>
+              <a:t>• Run a simple verification test</a:t>
+            </a:r>
+          </a:p>
+        </p:txBody>
+      </p:sp>
+      <p:sp>
+        <p:nvSpPr>
+          <p:cNvPr id="4" name="TextBox 3"/>
+          <p:cNvSpPr txBox="1"/>
+          <p:nvPr/>
+        </p:nvSpPr>
+        <p:spPr>
+          <a:xfrm>
+            <a:off x="548640" y="6355080"/>
+            <a:ext cx="11064240" cy="320040"/>
+          </a:xfrm>
+          <a:prstGeom prst="rect">
+            <a:avLst/>
+          </a:prstGeom>
+          <a:noFill/>
+        </p:spPr>
+        <p:txBody>
+          <a:bodyPr wrap="square">
+            <a:noAutofit/>
+          </a:bodyPr>
+          <a:lstStyle/>
+          <a:p>
+            <a:pPr algn="r">
+              <a:lnSpc>
+                <a:spcPts val="2200"/>
+              </a:lnSpc>
+              <a:defRPr sz="1000" b="0">
+                <a:solidFill>
+                  <a:srgbClr val="666666"/>
+                </a:solidFill>
+                <a:latin typeface="Calibri"/>
+              </a:defRPr>
+            </a:pPr>
+            <a:r>
+              <a:t>learn_uvm2017_sv_verilator / Module 0</a:t>
+            </a:r>
+          </a:p>
+        </p:txBody>
+      </p:sp>
+    </p:spTree>
+  </p:cSld>
+  <p:clrMapOvr>
+    <a:masterClrMapping/>
+  </p:clrMapOvr>
+</p:sld>
+</file>
+
+<file path=ppt/slides/slide54.xml><?xml version="1.0" encoding="utf-8"?>
+<p:sld xmlns:a="http://schemas.openxmlformats.org/drawingml/2006/main" xmlns:p="http://schemas.openxmlformats.org/presentationml/2006/main" xmlns:r="http://schemas.openxmlformats.org/officeDocument/2006/relationships">
+  <p:cSld>
+    <p:spTree>
+      <p:nvGrpSpPr>
+        <p:cNvPr id="1" name=""/>
+        <p:cNvGrpSpPr/>
+        <p:nvPr/>
+      </p:nvGrpSpPr>
+      <p:grpSpPr/>
+      <p:sp>
+        <p:nvSpPr>
+          <p:cNvPr id="2" name="TextBox 1"/>
+          <p:cNvSpPr txBox="1"/>
+          <p:nvPr/>
+        </p:nvSpPr>
+        <p:spPr>
+          <a:xfrm>
+            <a:off x="548640" y="411480"/>
+            <a:ext cx="11064240" cy="777240"/>
+          </a:xfrm>
+          <a:prstGeom prst="rect">
+            <a:avLst/>
+          </a:prstGeom>
+          <a:noFill/>
+        </p:spPr>
+        <p:txBody>
+          <a:bodyPr wrap="square">
+            <a:noAutofit/>
+          </a:bodyPr>
+          <a:lstStyle/>
+          <a:p>
+            <a:pPr>
+              <a:lnSpc>
+                <a:spcPts val="2200"/>
+              </a:lnSpc>
+              <a:defRPr sz="2800" b="1">
+                <a:solidFill>
+                  <a:srgbClr val="1A1A2E"/>
+                </a:solidFill>
+                <a:latin typeface="Calibri"/>
+              </a:defRPr>
+            </a:pPr>
+            <a:r>
+              <a:t>What you should know (2/2)</a:t>
+            </a:r>
+          </a:p>
+        </p:txBody>
+      </p:sp>
+      <p:sp>
+        <p:nvSpPr>
+          <p:cNvPr id="3" name="TextBox 2"/>
+          <p:cNvSpPr txBox="1"/>
+          <p:nvPr/>
+        </p:nvSpPr>
+        <p:spPr>
+          <a:xfrm>
+            <a:off x="548640" y="1234440"/>
+            <a:ext cx="11064240" cy="4937760"/>
+          </a:xfrm>
+          <a:prstGeom prst="rect">
+            <a:avLst/>
+          </a:prstGeom>
+          <a:noFill/>
+        </p:spPr>
+        <p:txBody>
+          <a:bodyPr wrap="square">
+            <a:noAutofit/>
+          </a:bodyPr>
+          <a:lstStyle/>
+          <a:p>
+            <a:pPr>
+              <a:lnSpc>
+                <a:spcPts val="2200"/>
+              </a:lnSpc>
+              <a:spcAft>
+                <a:spcPts val="1000"/>
+              </a:spcAft>
+              <a:defRPr sz="2000" b="0">
+                <a:solidFill>
+                  <a:srgbClr val="333333"/>
+                </a:solidFill>
+                <a:latin typeface="Calibri"/>
+              </a:defRPr>
+            </a:pPr>
+            <a:r>
+              <a:t>• Understand Verilator limitations</a:t>
+            </a:r>
+          </a:p>
+          <a:p>
+            <a:pPr>
+              <a:lnSpc>
+                <a:spcPts val="2200"/>
+              </a:lnSpc>
+              <a:spcAft>
+                <a:spcPts val="1000"/>
+              </a:spcAft>
+              <a:defRPr sz="2000" b="0">
+                <a:solidFill>
+                  <a:srgbClr val="333333"/>
+                </a:solidFill>
+                <a:latin typeface="Calibri"/>
+              </a:defRPr>
+            </a:pPr>
+            <a:r>
+              <a:t>• Troubleshoot common installation issues</a:t>
+            </a:r>
+          </a:p>
+        </p:txBody>
+      </p:sp>
+      <p:sp>
+        <p:nvSpPr>
+          <p:cNvPr id="4" name="TextBox 3"/>
+          <p:cNvSpPr txBox="1"/>
+          <p:nvPr/>
+        </p:nvSpPr>
+        <p:spPr>
+          <a:xfrm>
+            <a:off x="548640" y="6355080"/>
+            <a:ext cx="11064240" cy="320040"/>
+          </a:xfrm>
+          <a:prstGeom prst="rect">
+            <a:avLst/>
+          </a:prstGeom>
+          <a:noFill/>
+        </p:spPr>
+        <p:txBody>
+          <a:bodyPr wrap="square">
+            <a:noAutofit/>
+          </a:bodyPr>
+          <a:lstStyle/>
+          <a:p>
+            <a:pPr algn="r">
+              <a:lnSpc>
+                <a:spcPts val="2200"/>
+              </a:lnSpc>
+              <a:defRPr sz="1000" b="0">
+                <a:solidFill>
+                  <a:srgbClr val="666666"/>
+                </a:solidFill>
+                <a:latin typeface="Calibri"/>
+              </a:defRPr>
+            </a:pPr>
+            <a:r>
+              <a:t>learn_uvm2017_sv_verilator / Module 0</a:t>
+            </a:r>
+          </a:p>
+        </p:txBody>
+      </p:sp>
+    </p:spTree>
+  </p:cSld>
+  <p:clrMapOvr>
+    <a:masterClrMapping/>
+  </p:clrMapOvr>
+</p:sld>
+</file>
+
+<file path=ppt/slides/slide55.xml><?xml version="1.0" encoding="utf-8"?>
+<p:sld xmlns:a="http://schemas.openxmlformats.org/drawingml/2006/main" xmlns:p="http://schemas.openxmlformats.org/presentationml/2006/main" xmlns:r="http://schemas.openxmlformats.org/officeDocument/2006/relationships">
+  <p:cSld>
+    <p:spTree>
+      <p:nvGrpSpPr>
+        <p:cNvPr id="1" name=""/>
+        <p:cNvGrpSpPr/>
+        <p:nvPr/>
+      </p:nvGrpSpPr>
+      <p:grpSpPr/>
+      <p:sp>
+        <p:nvSpPr>
+          <p:cNvPr id="2" name="TextBox 1"/>
+          <p:cNvSpPr txBox="1"/>
+          <p:nvPr/>
+        </p:nvSpPr>
+        <p:spPr>
+          <a:xfrm>
+            <a:off x="548640" y="411480"/>
+            <a:ext cx="11064240" cy="777240"/>
+          </a:xfrm>
+          <a:prstGeom prst="rect">
+            <a:avLst/>
+          </a:prstGeom>
+          <a:noFill/>
+        </p:spPr>
+        <p:txBody>
+          <a:bodyPr wrap="square">
+            <a:noAutofit/>
+          </a:bodyPr>
+          <a:lstStyle/>
+          <a:p>
+            <a:pPr>
+              <a:lnSpc>
+                <a:spcPts val="2200"/>
+              </a:lnSpc>
+              <a:defRPr sz="2800" b="1">
+                <a:solidFill>
+                  <a:srgbClr val="1A1A2E"/>
+                </a:solidFill>
+                <a:latin typeface="Calibri"/>
+              </a:defRPr>
+            </a:pPr>
+            <a:r>
+              <a:t>Exercises</a:t>
+            </a:r>
+          </a:p>
+        </p:txBody>
+      </p:sp>
+      <p:sp>
+        <p:nvSpPr>
+          <p:cNvPr id="3" name="TextBox 2"/>
+          <p:cNvSpPr txBox="1"/>
+          <p:nvPr/>
+        </p:nvSpPr>
+        <p:spPr>
+          <a:xfrm>
+            <a:off x="548640" y="1234440"/>
+            <a:ext cx="11064240" cy="4937760"/>
+          </a:xfrm>
+          <a:prstGeom prst="rect">
+            <a:avLst/>
+          </a:prstGeom>
+          <a:noFill/>
+        </p:spPr>
+        <p:txBody>
+          <a:bodyPr wrap="square">
+            <a:noAutofit/>
+          </a:bodyPr>
+          <a:lstStyle/>
+          <a:p>
+            <a:pPr>
+              <a:lnSpc>
+                <a:spcPts val="2200"/>
+              </a:lnSpc>
+              <a:spcAft>
+                <a:spcPts val="1000"/>
+              </a:spcAft>
+              <a:defRPr sz="2000" b="0">
+                <a:solidFill>
+                  <a:srgbClr val="333333"/>
+                </a:solidFill>
+                <a:latin typeface="Calibri"/>
+              </a:defRPr>
+            </a:pPr>
+            <a:r>
+              <a:t>• Installation Verification</a:t>
+            </a:r>
+          </a:p>
+          <a:p>
+            <a:pPr>
+              <a:lnSpc>
+                <a:spcPts val="2200"/>
+              </a:lnSpc>
+              <a:spcAft>
+                <a:spcPts val="1000"/>
+              </a:spcAft>
+              <a:defRPr sz="2000" b="0">
+                <a:solidFill>
+                  <a:srgbClr val="333333"/>
+                </a:solidFill>
+                <a:latin typeface="Calibri"/>
+              </a:defRPr>
+            </a:pPr>
+            <a:r>
+              <a:t>• Environment Setup</a:t>
+            </a:r>
+          </a:p>
+          <a:p>
+            <a:pPr>
+              <a:lnSpc>
+                <a:spcPts val="2200"/>
+              </a:lnSpc>
+              <a:spcAft>
+                <a:spcPts val="1000"/>
+              </a:spcAft>
+              <a:defRPr sz="2000" b="0">
+                <a:solidFill>
+                  <a:srgbClr val="333333"/>
+                </a:solidFill>
+                <a:latin typeface="Calibri"/>
+              </a:defRPr>
+            </a:pPr>
+            <a:r>
+              <a:t>• First Test</a:t>
+            </a:r>
+          </a:p>
+          <a:p>
+            <a:pPr>
+              <a:lnSpc>
+                <a:spcPts val="2200"/>
+              </a:lnSpc>
+              <a:spcAft>
+                <a:spcPts val="1000"/>
+              </a:spcAft>
+              <a:defRPr sz="2000" b="0">
+                <a:solidFill>
+                  <a:srgbClr val="333333"/>
+                </a:solidFill>
+                <a:latin typeface="Calibri"/>
+              </a:defRPr>
+            </a:pPr>
+            <a:r>
+              <a:t>• IDE Configuration</a:t>
+            </a:r>
+          </a:p>
+          <a:p>
+            <a:pPr>
+              <a:lnSpc>
+                <a:spcPts val="2200"/>
+              </a:lnSpc>
+              <a:spcAft>
+                <a:spcPts val="1000"/>
+              </a:spcAft>
+              <a:defRPr sz="2000" b="0">
+                <a:solidFill>
+                  <a:srgbClr val="333333"/>
+                </a:solidFill>
+                <a:latin typeface="Calibri"/>
+              </a:defRPr>
+            </a:pPr>
+            <a:r>
+              <a:t>• Project Structure</a:t>
+            </a:r>
+          </a:p>
+        </p:txBody>
+      </p:sp>
+      <p:sp>
+        <p:nvSpPr>
+          <p:cNvPr id="4" name="TextBox 3"/>
+          <p:cNvSpPr txBox="1"/>
+          <p:nvPr/>
+        </p:nvSpPr>
+        <p:spPr>
+          <a:xfrm>
+            <a:off x="548640" y="6355080"/>
+            <a:ext cx="11064240" cy="320040"/>
+          </a:xfrm>
+          <a:prstGeom prst="rect">
+            <a:avLst/>
+          </a:prstGeom>
+          <a:noFill/>
+        </p:spPr>
+        <p:txBody>
+          <a:bodyPr wrap="square">
+            <a:noAutofit/>
+          </a:bodyPr>
+          <a:lstStyle/>
+          <a:p>
+            <a:pPr algn="r">
+              <a:lnSpc>
+                <a:spcPts val="2200"/>
+              </a:lnSpc>
+              <a:defRPr sz="1000" b="0">
+                <a:solidFill>
+                  <a:srgbClr val="666666"/>
+                </a:solidFill>
+                <a:latin typeface="Calibri"/>
+              </a:defRPr>
+            </a:pPr>
+            <a:r>
+              <a:t>learn_uvm2017_sv_verilator / Module 0</a:t>
+            </a:r>
+          </a:p>
+        </p:txBody>
+      </p:sp>
+    </p:spTree>
+  </p:cSld>
+  <p:clrMapOvr>
+    <a:masterClrMapping/>
+  </p:clrMapOvr>
+</p:sld>
+</file>
+
+<file path=ppt/slides/slide56.xml><?xml version="1.0" encoding="utf-8"?>
+<p:sld xmlns:a="http://schemas.openxmlformats.org/drawingml/2006/main" xmlns:p="http://schemas.openxmlformats.org/presentationml/2006/main" xmlns:r="http://schemas.openxmlformats.org/officeDocument/2006/relationships">
+  <p:cSld>
+    <p:spTree>
+      <p:nvGrpSpPr>
+        <p:cNvPr id="1" name=""/>
+        <p:cNvGrpSpPr/>
+        <p:nvPr/>
+      </p:nvGrpSpPr>
+      <p:grpSpPr/>
+      <p:sp>
+        <p:nvSpPr>
+          <p:cNvPr id="2" name="TextBox 1"/>
+          <p:cNvSpPr txBox="1"/>
+          <p:nvPr/>
+        </p:nvSpPr>
+        <p:spPr>
+          <a:xfrm>
+            <a:off x="548640" y="411480"/>
+            <a:ext cx="11064240" cy="777240"/>
+          </a:xfrm>
+          <a:prstGeom prst="rect">
+            <a:avLst/>
+          </a:prstGeom>
+          <a:noFill/>
+        </p:spPr>
+        <p:txBody>
+          <a:bodyPr wrap="square">
+            <a:noAutofit/>
+          </a:bodyPr>
+          <a:lstStyle/>
+          <a:p>
+            <a:pPr>
+              <a:lnSpc>
+                <a:spcPts val="2200"/>
+              </a:lnSpc>
+              <a:defRPr sz="2800" b="1">
+                <a:solidFill>
+                  <a:srgbClr val="1A1A2E"/>
+                </a:solidFill>
+                <a:latin typeface="Calibri"/>
+              </a:defRPr>
+            </a:pPr>
+            <a:r>
+              <a:t>Assessment checklist</a:t>
+            </a:r>
+          </a:p>
+        </p:txBody>
+      </p:sp>
+      <p:sp>
+        <p:nvSpPr>
+          <p:cNvPr id="3" name="TextBox 2"/>
+          <p:cNvSpPr txBox="1"/>
+          <p:nvPr/>
+        </p:nvSpPr>
+        <p:spPr>
+          <a:xfrm>
+            <a:off x="548640" y="1234440"/>
+            <a:ext cx="11064240" cy="4937760"/>
+          </a:xfrm>
+          <a:prstGeom prst="rect">
+            <a:avLst/>
+          </a:prstGeom>
+          <a:noFill/>
+        </p:spPr>
+        <p:txBody>
+          <a:bodyPr wrap="square">
+            <a:noAutofit/>
+          </a:bodyPr>
+          <a:lstStyle/>
+          <a:p>
+            <a:pPr>
+              <a:lnSpc>
+                <a:spcPts val="2200"/>
+              </a:lnSpc>
+              <a:spcAft>
+                <a:spcPts val="1000"/>
+              </a:spcAft>
+              <a:defRPr sz="2000" b="0">
+                <a:solidFill>
+                  <a:srgbClr val="333333"/>
+                </a:solidFill>
+                <a:latin typeface="Calibri"/>
+              </a:defRPr>
+            </a:pPr>
+            <a:r>
+              <a:t>• Can install all required tools independently</a:t>
+            </a:r>
+          </a:p>
+          <a:p>
+            <a:pPr>
+              <a:lnSpc>
+                <a:spcPts val="2200"/>
+              </a:lnSpc>
+              <a:spcAft>
+                <a:spcPts val="1000"/>
+              </a:spcAft>
+              <a:defRPr sz="2000" b="0">
+                <a:solidFill>
+                  <a:srgbClr val="333333"/>
+                </a:solidFill>
+                <a:latin typeface="Calibri"/>
+              </a:defRPr>
+            </a:pPr>
+            <a:r>
+              <a:t>• Can set up Verilator</a:t>
+            </a:r>
+          </a:p>
+          <a:p>
+            <a:pPr>
+              <a:lnSpc>
+                <a:spcPts val="2200"/>
+              </a:lnSpc>
+              <a:spcAft>
+                <a:spcPts val="1000"/>
+              </a:spcAft>
+              <a:defRPr sz="2000" b="0">
+                <a:solidFill>
+                  <a:srgbClr val="333333"/>
+                </a:solidFill>
+                <a:latin typeface="Calibri"/>
+              </a:defRPr>
+            </a:pPr>
+            <a:r>
+              <a:t>• Can verify Verilator installation</a:t>
+            </a:r>
+          </a:p>
+          <a:p>
+            <a:pPr>
+              <a:lnSpc>
+                <a:spcPts val="2200"/>
+              </a:lnSpc>
+              <a:spcAft>
+                <a:spcPts val="1000"/>
+              </a:spcAft>
+              <a:defRPr sz="2000" b="0">
+                <a:solidFill>
+                  <a:srgbClr val="333333"/>
+                </a:solidFill>
+                <a:latin typeface="Calibri"/>
+              </a:defRPr>
+            </a:pPr>
+            <a:r>
+              <a:t>• Can verify UVM library installation</a:t>
+            </a:r>
+          </a:p>
+          <a:p>
+            <a:pPr>
+              <a:lnSpc>
+                <a:spcPts val="2200"/>
+              </a:lnSpc>
+              <a:spcAft>
+                <a:spcPts val="1000"/>
+              </a:spcAft>
+              <a:defRPr sz="2000" b="0">
+                <a:solidFill>
+                  <a:srgbClr val="333333"/>
+                </a:solidFill>
+                <a:latin typeface="Calibri"/>
+              </a:defRPr>
+            </a:pPr>
+            <a:r>
+              <a:t>• Can configure IDE for verification work</a:t>
+            </a:r>
+          </a:p>
+          <a:p>
+            <a:pPr>
+              <a:lnSpc>
+                <a:spcPts val="2200"/>
+              </a:lnSpc>
+              <a:spcAft>
+                <a:spcPts val="1000"/>
+              </a:spcAft>
+              <a:defRPr sz="2000" b="0">
+                <a:solidFill>
+                  <a:srgbClr val="333333"/>
+                </a:solidFill>
+                <a:latin typeface="Calibri"/>
+              </a:defRPr>
+            </a:pPr>
+            <a:r>
+              <a:t>• Can create and run a simple test</a:t>
+            </a:r>
+          </a:p>
+        </p:txBody>
+      </p:sp>
+      <p:sp>
+        <p:nvSpPr>
+          <p:cNvPr id="4" name="TextBox 3"/>
+          <p:cNvSpPr txBox="1"/>
+          <p:nvPr/>
+        </p:nvSpPr>
+        <p:spPr>
+          <a:xfrm>
+            <a:off x="548640" y="6355080"/>
+            <a:ext cx="11064240" cy="320040"/>
+          </a:xfrm>
+          <a:prstGeom prst="rect">
+            <a:avLst/>
+          </a:prstGeom>
+          <a:noFill/>
+        </p:spPr>
+        <p:txBody>
+          <a:bodyPr wrap="square">
+            <a:noAutofit/>
+          </a:bodyPr>
+          <a:lstStyle/>
+          <a:p>
+            <a:pPr algn="r">
+              <a:lnSpc>
+                <a:spcPts val="2200"/>
+              </a:lnSpc>
+              <a:defRPr sz="1000" b="0">
+                <a:solidFill>
+                  <a:srgbClr val="666666"/>
+                </a:solidFill>
+                <a:latin typeface="Calibri"/>
+              </a:defRPr>
+            </a:pPr>
+            <a:r>
+              <a:t>learn_uvm2017_sv_verilator / Module 0</a:t>
+            </a:r>
+          </a:p>
+        </p:txBody>
+      </p:sp>
+    </p:spTree>
+  </p:cSld>
+  <p:clrMapOvr>
+    <a:masterClrMapping/>
+  </p:clrMapOvr>
+</p:sld>
+</file>
+
+<file path=ppt/slides/slide57.xml><?xml version="1.0" encoding="utf-8"?>
+<p:sld xmlns:a="http://schemas.openxmlformats.org/drawingml/2006/main" xmlns:p="http://schemas.openxmlformats.org/presentationml/2006/main" xmlns:r="http://schemas.openxmlformats.org/officeDocument/2006/relationships">
+  <p:cSld>
+    <p:spTree>
+      <p:nvGrpSpPr>
+        <p:cNvPr id="1" name=""/>
+        <p:cNvGrpSpPr/>
+        <p:nvPr/>
+      </p:nvGrpSpPr>
+      <p:grpSpPr/>
+      <p:sp>
+        <p:nvSpPr>
+          <p:cNvPr id="2" name="TextBox 1"/>
+          <p:cNvSpPr txBox="1"/>
+          <p:nvPr/>
+        </p:nvSpPr>
+        <p:spPr>
+          <a:xfrm>
+            <a:off x="548640" y="411480"/>
+            <a:ext cx="11064240" cy="777240"/>
+          </a:xfrm>
+          <a:prstGeom prst="rect">
+            <a:avLst/>
+          </a:prstGeom>
+          <a:noFill/>
+        </p:spPr>
+        <p:txBody>
+          <a:bodyPr wrap="square">
+            <a:noAutofit/>
+          </a:bodyPr>
+          <a:lstStyle/>
+          <a:p>
+            <a:pPr>
+              <a:lnSpc>
+                <a:spcPts val="2200"/>
+              </a:lnSpc>
+              <a:defRPr sz="2800" b="1">
+                <a:solidFill>
+                  <a:srgbClr val="1A1A2E"/>
+                </a:solidFill>
+                <a:latin typeface="Calibri"/>
+              </a:defRPr>
+            </a:pPr>
+            <a:r>
+              <a:t>Summary &amp; next steps</a:t>
+            </a:r>
+          </a:p>
+        </p:txBody>
+      </p:sp>
+      <p:sp>
+        <p:nvSpPr>
+          <p:cNvPr id="3" name="TextBox 2"/>
+          <p:cNvSpPr txBox="1"/>
+          <p:nvPr/>
+        </p:nvSpPr>
+        <p:spPr>
+          <a:xfrm>
+            <a:off x="548640" y="1234440"/>
+            <a:ext cx="11064240" cy="4937760"/>
+          </a:xfrm>
+          <a:prstGeom prst="rect">
+            <a:avLst/>
+          </a:prstGeom>
+          <a:noFill/>
+        </p:spPr>
+        <p:txBody>
+          <a:bodyPr wrap="square">
+            <a:noAutofit/>
+          </a:bodyPr>
+          <a:lstStyle/>
+          <a:p>
             <a:pPr>
               <a:lnSpc>
                 <a:spcPts val="2200"/>
@@ -16189,7 +17733,7 @@
               </a:defRPr>
             </a:pPr>
             <a:r>
-              <a:t>• Run ./scripts/module0.sh --check</a:t>
+              <a:t>• Review module0/EXAMPLES.md and run each lab</a:t>
             </a:r>
           </a:p>
           <a:p>
